--- a/advisor_slides.pptx
+++ b/advisor_slides.pptx
@@ -9228,12 +9228,20 @@
           </a:p>
         </p:txBody>
       </p:sp>
-      <p:sp>
-        <p:nvSpPr>
-          <p:cNvPr id="7" name="Rectangle 6"/>
-          <p:cNvSpPr/>
-          <p:nvPr/>
-        </p:nvSpPr>
+      <p:pic>
+        <p:nvPicPr>
+          <p:cNvPr id="7" name="Picture 6" descr="fig_bch_burst.png"/>
+          <p:cNvPicPr>
+            <a:picLocks noChangeAspect="1"/>
+          </p:cNvPicPr>
+          <p:nvPr/>
+        </p:nvPicPr>
+        <p:blipFill>
+          <a:blip r:embed="rId2"/>
+          <a:stretch>
+            <a:fillRect/>
+          </a:stretch>
+        </p:blipFill>
         <p:spPr>
           <a:xfrm>
             <a:off x="182880" y="1097280"/>
@@ -9242,74 +9250,11 @@
           <a:prstGeom prst="rect">
             <a:avLst/>
           </a:prstGeom>
-          <a:solidFill>
-            <a:srgbClr val="F2F2F2"/>
-          </a:solidFill>
-          <a:ln w="12700">
-            <a:solidFill>
-              <a:srgbClr val="888888"/>
-            </a:solidFill>
-          </a:ln>
-        </p:spPr>
-        <p:style>
-          <a:lnRef idx="1">
-            <a:schemeClr val="accent1"/>
-          </a:lnRef>
-          <a:fillRef idx="3">
-            <a:schemeClr val="accent1"/>
-          </a:fillRef>
-          <a:effectRef idx="2">
-            <a:schemeClr val="accent1"/>
-          </a:effectRef>
-          <a:fontRef idx="minor">
-            <a:schemeClr val="lt1"/>
-          </a:fontRef>
-        </p:style>
-        <p:txBody>
-          <a:bodyPr rtlCol="0" anchor="ctr"/>
-          <a:lstStyle/>
-          <a:p>
-            <a:pPr algn="ctr"/>
-          </a:p>
-        </p:txBody>
-      </p:sp>
-      <p:sp>
-        <p:nvSpPr>
-          <p:cNvPr id="8" name="TextBox 7"/>
-          <p:cNvSpPr txBox="1"/>
-          <p:nvPr/>
-        </p:nvSpPr>
-        <p:spPr>
-          <a:xfrm>
-            <a:off x="182880" y="3474720"/>
-            <a:ext cx="11795760" cy="457200"/>
-          </a:xfrm>
-          <a:prstGeom prst="rect">
-            <a:avLst/>
-          </a:prstGeom>
-          <a:noFill/>
-        </p:spPr>
-        <p:txBody>
-          <a:bodyPr wrap="square">
-            <a:spAutoFit/>
-          </a:bodyPr>
-          <a:lstStyle/>
-          <a:p>
-            <a:pPr algn="ctr"/>
-            <a:r>
-              <a:rPr sz="1300" b="0" i="0">
-                <a:solidFill>
-                  <a:srgbClr val="888888"/>
-                </a:solidFill>
-              </a:rPr>
-              <a:t>[pending: fig_bch_burst.png]</a:t>
-            </a:r>
-          </a:p>
-        </p:txBody>
-      </p:sp>
-      <p:sp>
-        <p:nvSpPr>
-          <p:cNvPr id="9" name="Rectangle 8"/>
+        </p:spPr>
+      </p:pic>
+      <p:sp>
+        <p:nvSpPr>
+          <p:cNvPr id="8" name="Rectangle 7"/>
           <p:cNvSpPr/>
           <p:nvPr/>
         </p:nvSpPr>
@@ -9352,7 +9297,7 @@
       </p:sp>
       <p:sp>
         <p:nvSpPr>
-          <p:cNvPr id="10" name="TextBox 9"/>
+          <p:cNvPr id="9" name="TextBox 8"/>
           <p:cNvSpPr txBox="1"/>
           <p:nvPr/>
         </p:nvSpPr>
